--- a/CV_FFROMAGER.pptx
+++ b/CV_FFROMAGER.pptx
@@ -8718,7 +8718,7 @@
         <p:spPr>
           <a:xfrm>
             <a:off x="2937600" y="146520"/>
-            <a:ext cx="3985560" cy="730080"/>
+            <a:ext cx="3985560" cy="952653"/>
           </a:xfrm>
           <a:prstGeom prst="rect">
             <a:avLst/>
@@ -8752,7 +8752,7 @@
               </a:lnSpc>
             </a:pPr>
             <a:r>
-              <a:rPr lang="fr-FR" sz="1400" b="0" strike="noStrike" spc="-1">
+              <a:rPr lang="fr-FR" sz="1400" b="0" strike="noStrike" spc="-1" dirty="0">
                 <a:solidFill>
                   <a:schemeClr val="lt2">
                     <a:lumMod val="50000"/>
@@ -8761,9 +8761,9 @@
                 <a:latin typeface="Malgun Gothic"/>
                 <a:ea typeface="Malgun Gothic"/>
               </a:rPr>
-              <a:t>Passionné de nouvelles technologies, je propose de partager mon expertise de 30 ans dans le développement informatique</a:t>
-            </a:r>
-            <a:endParaRPr lang="en-US" sz="1400" b="0" strike="noStrike" spc="-1">
+              <a:t>Passionné de nouvelles technologies, je propose de rejoindre votre équipe afin de  partager mon expertise de 30 ans dans le développement informatique</a:t>
+            </a:r>
+            <a:endParaRPr lang="en-US" sz="1400" b="0" strike="noStrike" spc="-1" dirty="0">
               <a:solidFill>
                 <a:srgbClr val="000000"/>
               </a:solidFill>
@@ -10336,34 +10336,74 @@
               <a:t>, C/C++ depuis 30 ans, Django, Prolog, C# (ASP.NET model MVC), </a:t>
             </a:r>
             <a:r>
-              <a:rPr lang="fr-FR" sz="1050" b="0" strike="noStrike" spc="-1" dirty="0" err="1">
+              <a:rPr lang="fr-FR" sz="1050" spc="-1" dirty="0" err="1">
                 <a:solidFill>
                   <a:srgbClr val="595959"/>
                 </a:solidFill>
                 <a:latin typeface="Malgun Gothic"/>
                 <a:ea typeface="Malgun Gothic"/>
               </a:rPr>
-              <a:t>angular</a:t>
-            </a:r>
-            <a:r>
-              <a:rPr lang="fr-FR" sz="1050" b="0" strike="noStrike" spc="-1" dirty="0">
+              <a:t>A</a:t>
+            </a:r>
+            <a:r>
+              <a:rPr lang="fr-FR" sz="1050" b="0" strike="noStrike" spc="-1" dirty="0" err="1">
                 <a:solidFill>
                   <a:srgbClr val="595959"/>
                 </a:solidFill>
                 <a:latin typeface="Malgun Gothic"/>
                 <a:ea typeface="Malgun Gothic"/>
               </a:rPr>
-              <a:t>, </a:t>
-            </a:r>
-            <a:r>
-              <a:rPr lang="fr-FR" sz="1050" b="0" strike="noStrike" spc="-1" dirty="0" err="1">
+              <a:t>ngular</a:t>
+            </a:r>
+            <a:r>
+              <a:rPr lang="fr-FR" sz="1050" b="0" strike="noStrike" spc="-1" dirty="0">
                 <a:solidFill>
                   <a:srgbClr val="595959"/>
                 </a:solidFill>
                 <a:latin typeface="Malgun Gothic"/>
                 <a:ea typeface="Malgun Gothic"/>
               </a:rPr>
-              <a:t>sql</a:t>
+              <a:t>, </a:t>
+            </a:r>
+            <a:r>
+              <a:rPr lang="fr-FR" sz="1050" b="0" strike="noStrike" spc="-1" dirty="0" err="1">
+                <a:solidFill>
+                  <a:srgbClr val="595959"/>
+                </a:solidFill>
+                <a:latin typeface="Malgun Gothic"/>
+                <a:ea typeface="Malgun Gothic"/>
+              </a:rPr>
+              <a:t>React</a:t>
+            </a:r>
+            <a:r>
+              <a:rPr lang="fr-FR" sz="1050" b="0" strike="noStrike" spc="-1" dirty="0">
+                <a:solidFill>
+                  <a:srgbClr val="595959"/>
+                </a:solidFill>
+                <a:latin typeface="Malgun Gothic"/>
+                <a:ea typeface="Malgun Gothic"/>
+              </a:rPr>
+              <a:t>, </a:t>
+            </a:r>
+            <a:r>
+              <a:rPr lang="fr-FR" sz="1050" spc="-1" dirty="0">
+                <a:solidFill>
+                  <a:srgbClr val="595959"/>
+                </a:solidFill>
+                <a:latin typeface="Malgun Gothic"/>
+                <a:ea typeface="Malgun Gothic"/>
+              </a:rPr>
+              <a:t>S</a:t>
+            </a:r>
+            <a:r>
+              <a:rPr lang="fr-FR" sz="1050" b="0" strike="noStrike" spc="-1">
+                <a:solidFill>
+                  <a:srgbClr val="595959"/>
+                </a:solidFill>
+                <a:latin typeface="Malgun Gothic"/>
+                <a:ea typeface="Malgun Gothic"/>
+              </a:rPr>
+              <a:t>ql</a:t>
             </a:r>
             <a:r>
               <a:rPr lang="fr-FR" sz="1050" b="0" strike="noStrike" spc="-1" dirty="0">
